--- a/ゲーム科2年/00_前期/ゲーム開発Ⅰ/ゲーム物理学/座学/16_垂直抗力.pptx
+++ b/ゲーム科2年/00_前期/ゲーム開発Ⅰ/ゲーム物理学/座学/16_垂直抗力.pptx
@@ -272,7 +272,7 @@
           <a:p>
             <a:fld id="{E9CC885B-4903-4D54-9A93-00025F12DED9}" type="datetimeFigureOut">
               <a:rPr kumimoji="1" lang="ja-JP" altLang="en-US" smtClean="0"/>
-              <a:t>2025/7/30</a:t>
+              <a:t>2025/7/31</a:t>
             </a:fld>
             <a:endParaRPr kumimoji="1" lang="ja-JP" altLang="en-US"/>
           </a:p>
@@ -502,7 +502,7 @@
           <a:p>
             <a:fld id="{E9CC885B-4903-4D54-9A93-00025F12DED9}" type="datetimeFigureOut">
               <a:rPr kumimoji="1" lang="ja-JP" altLang="en-US" smtClean="0"/>
-              <a:t>2025/7/30</a:t>
+              <a:t>2025/7/31</a:t>
             </a:fld>
             <a:endParaRPr kumimoji="1" lang="ja-JP" altLang="en-US"/>
           </a:p>
@@ -742,7 +742,7 @@
           <a:p>
             <a:fld id="{E9CC885B-4903-4D54-9A93-00025F12DED9}" type="datetimeFigureOut">
               <a:rPr kumimoji="1" lang="ja-JP" altLang="en-US" smtClean="0"/>
-              <a:t>2025/7/30</a:t>
+              <a:t>2025/7/31</a:t>
             </a:fld>
             <a:endParaRPr kumimoji="1" lang="ja-JP" altLang="en-US"/>
           </a:p>
@@ -972,7 +972,7 @@
           <a:p>
             <a:fld id="{E9CC885B-4903-4D54-9A93-00025F12DED9}" type="datetimeFigureOut">
               <a:rPr kumimoji="1" lang="ja-JP" altLang="en-US" smtClean="0"/>
-              <a:t>2025/7/30</a:t>
+              <a:t>2025/7/31</a:t>
             </a:fld>
             <a:endParaRPr kumimoji="1" lang="ja-JP" altLang="en-US"/>
           </a:p>
@@ -1247,7 +1247,7 @@
           <a:p>
             <a:fld id="{E9CC885B-4903-4D54-9A93-00025F12DED9}" type="datetimeFigureOut">
               <a:rPr kumimoji="1" lang="ja-JP" altLang="en-US" smtClean="0"/>
-              <a:t>2025/7/30</a:t>
+              <a:t>2025/7/31</a:t>
             </a:fld>
             <a:endParaRPr kumimoji="1" lang="ja-JP" altLang="en-US"/>
           </a:p>
@@ -1576,7 +1576,7 @@
           <a:p>
             <a:fld id="{E9CC885B-4903-4D54-9A93-00025F12DED9}" type="datetimeFigureOut">
               <a:rPr kumimoji="1" lang="ja-JP" altLang="en-US" smtClean="0"/>
-              <a:t>2025/7/30</a:t>
+              <a:t>2025/7/31</a:t>
             </a:fld>
             <a:endParaRPr kumimoji="1" lang="ja-JP" altLang="en-US"/>
           </a:p>
@@ -2052,7 +2052,7 @@
           <a:p>
             <a:fld id="{E9CC885B-4903-4D54-9A93-00025F12DED9}" type="datetimeFigureOut">
               <a:rPr kumimoji="1" lang="ja-JP" altLang="en-US" smtClean="0"/>
-              <a:t>2025/7/30</a:t>
+              <a:t>2025/7/31</a:t>
             </a:fld>
             <a:endParaRPr kumimoji="1" lang="ja-JP" altLang="en-US"/>
           </a:p>
@@ -2193,7 +2193,7 @@
           <a:p>
             <a:fld id="{E9CC885B-4903-4D54-9A93-00025F12DED9}" type="datetimeFigureOut">
               <a:rPr kumimoji="1" lang="ja-JP" altLang="en-US" smtClean="0"/>
-              <a:t>2025/7/30</a:t>
+              <a:t>2025/7/31</a:t>
             </a:fld>
             <a:endParaRPr kumimoji="1" lang="ja-JP" altLang="en-US"/>
           </a:p>
@@ -2306,7 +2306,7 @@
           <a:p>
             <a:fld id="{E9CC885B-4903-4D54-9A93-00025F12DED9}" type="datetimeFigureOut">
               <a:rPr kumimoji="1" lang="ja-JP" altLang="en-US" smtClean="0"/>
-              <a:t>2025/7/30</a:t>
+              <a:t>2025/7/31</a:t>
             </a:fld>
             <a:endParaRPr kumimoji="1" lang="ja-JP" altLang="en-US"/>
           </a:p>
@@ -2649,7 +2649,7 @@
           <a:p>
             <a:fld id="{E9CC885B-4903-4D54-9A93-00025F12DED9}" type="datetimeFigureOut">
               <a:rPr kumimoji="1" lang="ja-JP" altLang="en-US" smtClean="0"/>
-              <a:t>2025/7/30</a:t>
+              <a:t>2025/7/31</a:t>
             </a:fld>
             <a:endParaRPr kumimoji="1" lang="ja-JP" altLang="en-US"/>
           </a:p>
@@ -2937,7 +2937,7 @@
           <a:p>
             <a:fld id="{E9CC885B-4903-4D54-9A93-00025F12DED9}" type="datetimeFigureOut">
               <a:rPr kumimoji="1" lang="ja-JP" altLang="en-US" smtClean="0"/>
-              <a:t>2025/7/30</a:t>
+              <a:t>2025/7/31</a:t>
             </a:fld>
             <a:endParaRPr kumimoji="1" lang="ja-JP" altLang="en-US"/>
           </a:p>
@@ -3210,7 +3210,7 @@
           <a:p>
             <a:fld id="{E9CC885B-4903-4D54-9A93-00025F12DED9}" type="datetimeFigureOut">
               <a:rPr kumimoji="1" lang="ja-JP" altLang="en-US" smtClean="0"/>
-              <a:t>2025/7/30</a:t>
+              <a:t>2025/7/31</a:t>
             </a:fld>
             <a:endParaRPr kumimoji="1" lang="ja-JP" altLang="en-US"/>
           </a:p>
@@ -5081,8 +5081,8 @@
           </a:fontRef>
         </p:style>
       </p:cxnSp>
-      <mc:AlternateContent xmlns:mc="http://schemas.openxmlformats.org/markup-compatibility/2006">
-        <mc:Choice xmlns:a14="http://schemas.microsoft.com/office/drawing/2010/main" Requires="a14">
+      <mc:AlternateContent xmlns:mc="http://schemas.openxmlformats.org/markup-compatibility/2006" xmlns:a14="http://schemas.microsoft.com/office/drawing/2010/main">
+        <mc:Choice Requires="a14">
           <p:sp>
             <p:nvSpPr>
               <p:cNvPr id="17" name="テキスト ボックス 16">
@@ -5111,6 +5111,7 @@
               </a:bodyPr>
               <a:lstStyle/>
               <a:p>
+                <a:pPr/>
                 <a14:m>
                   <m:oMathPara xmlns:m="http://schemas.openxmlformats.org/officeDocument/2006/math">
                     <m:oMathParaPr>
@@ -5155,7 +5156,7 @@
             </p:txBody>
           </p:sp>
         </mc:Choice>
-        <mc:Fallback>
+        <mc:Fallback xmlns="">
           <p:sp>
             <p:nvSpPr>
               <p:cNvPr id="17" name="テキスト ボックス 16">
@@ -5200,8 +5201,8 @@
           </p:sp>
         </mc:Fallback>
       </mc:AlternateContent>
-      <mc:AlternateContent xmlns:mc="http://schemas.openxmlformats.org/markup-compatibility/2006">
-        <mc:Choice xmlns:a14="http://schemas.microsoft.com/office/drawing/2010/main" Requires="a14">
+      <mc:AlternateContent xmlns:mc="http://schemas.openxmlformats.org/markup-compatibility/2006" xmlns:a14="http://schemas.microsoft.com/office/drawing/2010/main">
+        <mc:Choice Requires="a14">
           <p:sp>
             <p:nvSpPr>
               <p:cNvPr id="18" name="テキスト ボックス 17">
@@ -5230,6 +5231,7 @@
               </a:bodyPr>
               <a:lstStyle/>
               <a:p>
+                <a:pPr/>
                 <a14:m>
                   <m:oMathPara xmlns:m="http://schemas.openxmlformats.org/officeDocument/2006/math">
                     <m:oMathParaPr>
@@ -5274,7 +5276,7 @@
             </p:txBody>
           </p:sp>
         </mc:Choice>
-        <mc:Fallback>
+        <mc:Fallback xmlns="">
           <p:sp>
             <p:nvSpPr>
               <p:cNvPr id="18" name="テキスト ボックス 17">
@@ -5493,8 +5495,8 @@
           </a:p>
         </p:txBody>
       </p:sp>
-      <mc:AlternateContent xmlns:mc="http://schemas.openxmlformats.org/markup-compatibility/2006">
-        <mc:Choice xmlns:a14="http://schemas.microsoft.com/office/drawing/2010/main" Requires="a14">
+      <mc:AlternateContent xmlns:mc="http://schemas.openxmlformats.org/markup-compatibility/2006" xmlns:a14="http://schemas.microsoft.com/office/drawing/2010/main">
+        <mc:Choice Requires="a14">
           <p:sp>
             <p:nvSpPr>
               <p:cNvPr id="6" name="テキスト ボックス 5">
@@ -5760,7 +5762,7 @@
             </p:txBody>
           </p:sp>
         </mc:Choice>
-        <mc:Fallback>
+        <mc:Fallback xmlns="">
           <p:sp>
             <p:nvSpPr>
               <p:cNvPr id="6" name="テキスト ボックス 5">
@@ -5871,8 +5873,8 @@
           </a:p>
         </p:txBody>
       </p:sp>
-      <mc:AlternateContent xmlns:mc="http://schemas.openxmlformats.org/markup-compatibility/2006">
-        <mc:Choice xmlns:a14="http://schemas.microsoft.com/office/drawing/2010/main" Requires="a14">
+      <mc:AlternateContent xmlns:mc="http://schemas.openxmlformats.org/markup-compatibility/2006" xmlns:a14="http://schemas.microsoft.com/office/drawing/2010/main">
+        <mc:Choice Requires="a14">
           <p:sp>
             <p:nvSpPr>
               <p:cNvPr id="6" name="テキスト ボックス 5">
@@ -6373,7 +6375,7 @@
             </p:txBody>
           </p:sp>
         </mc:Choice>
-        <mc:Fallback>
+        <mc:Fallback xmlns="">
           <p:sp>
             <p:nvSpPr>
               <p:cNvPr id="6" name="テキスト ボックス 5">
@@ -6484,8 +6486,8 @@
           </a:p>
         </p:txBody>
       </p:sp>
-      <mc:AlternateContent xmlns:mc="http://schemas.openxmlformats.org/markup-compatibility/2006">
-        <mc:Choice xmlns:a14="http://schemas.microsoft.com/office/drawing/2010/main" Requires="a14">
+      <mc:AlternateContent xmlns:mc="http://schemas.openxmlformats.org/markup-compatibility/2006" xmlns:a14="http://schemas.microsoft.com/office/drawing/2010/main">
+        <mc:Choice Requires="a14">
           <p:sp>
             <p:nvSpPr>
               <p:cNvPr id="6" name="テキスト ボックス 5">
@@ -6773,7 +6775,7 @@
             </p:txBody>
           </p:sp>
         </mc:Choice>
-        <mc:Fallback>
+        <mc:Fallback xmlns="">
           <p:sp>
             <p:nvSpPr>
               <p:cNvPr id="6" name="テキスト ボックス 5">
@@ -8018,8 +8020,8 @@
           </a:p>
         </p:txBody>
       </p:sp>
-      <mc:AlternateContent xmlns:mc="http://schemas.openxmlformats.org/markup-compatibility/2006">
-        <mc:Choice xmlns:a14="http://schemas.microsoft.com/office/drawing/2010/main" Requires="a14">
+      <mc:AlternateContent xmlns:mc="http://schemas.openxmlformats.org/markup-compatibility/2006" xmlns:a14="http://schemas.microsoft.com/office/drawing/2010/main">
+        <mc:Choice Requires="a14">
           <p:sp>
             <p:nvSpPr>
               <p:cNvPr id="6" name="テキスト ボックス 5">
@@ -8383,7 +8385,7 @@
             </p:txBody>
           </p:sp>
         </mc:Choice>
-        <mc:Fallback>
+        <mc:Fallback xmlns="">
           <p:sp>
             <p:nvSpPr>
               <p:cNvPr id="6" name="テキスト ボックス 5">
@@ -8494,8 +8496,8 @@
           </a:p>
         </p:txBody>
       </p:sp>
-      <mc:AlternateContent xmlns:mc="http://schemas.openxmlformats.org/markup-compatibility/2006">
-        <mc:Choice xmlns:a14="http://schemas.microsoft.com/office/drawing/2010/main" Requires="a14">
+      <mc:AlternateContent xmlns:mc="http://schemas.openxmlformats.org/markup-compatibility/2006" xmlns:a14="http://schemas.microsoft.com/office/drawing/2010/main">
+        <mc:Choice Requires="a14">
           <p:sp>
             <p:nvSpPr>
               <p:cNvPr id="6" name="テキスト ボックス 5">
@@ -8967,7 +8969,7 @@
             </p:txBody>
           </p:sp>
         </mc:Choice>
-        <mc:Fallback>
+        <mc:Fallback xmlns="">
           <p:sp>
             <p:nvSpPr>
               <p:cNvPr id="6" name="テキスト ボックス 5">
@@ -9406,12 +9408,51 @@
           </a:fontRef>
         </p:style>
       </p:cxnSp>
+      <p:sp>
+        <p:nvSpPr>
+          <p:cNvPr id="9" name="テキスト ボックス 8">
+            <a:extLst>
+              <a:ext uri="{FF2B5EF4-FFF2-40B4-BE49-F238E27FC236}">
+                <a16:creationId xmlns:a16="http://schemas.microsoft.com/office/drawing/2014/main" id="{EC63539D-08AE-4428-B9EA-232077C800D9}"/>
+              </a:ext>
+            </a:extLst>
+          </p:cNvPr>
+          <p:cNvSpPr txBox="1"/>
+          <p:nvPr/>
+        </p:nvSpPr>
+        <p:spPr>
+          <a:xfrm>
+            <a:off x="5148919" y="4537928"/>
+            <a:ext cx="745067" cy="369332"/>
+          </a:xfrm>
+          <a:prstGeom prst="rect">
+            <a:avLst/>
+          </a:prstGeom>
+          <a:noFill/>
+        </p:spPr>
+        <p:txBody>
+          <a:bodyPr wrap="square">
+            <a:spAutoFit/>
+          </a:bodyPr>
+          <a:lstStyle/>
+          <a:p>
+            <a:r>
+              <a:rPr lang="ja-JP" altLang="en-US" b="1" dirty="0">
+                <a:solidFill>
+                  <a:srgbClr val="7030A0"/>
+                </a:solidFill>
+              </a:rPr>
+              <a:t>重さ</a:t>
+            </a:r>
+          </a:p>
+        </p:txBody>
+      </p:sp>
       <p:cxnSp>
         <p:nvCxnSpPr>
-          <p:cNvPr id="8" name="直線矢印コネクタ 7">
-            <a:extLst>
-              <a:ext uri="{FF2B5EF4-FFF2-40B4-BE49-F238E27FC236}">
-                <a16:creationId xmlns:a16="http://schemas.microsoft.com/office/drawing/2014/main" id="{4AC603CF-857F-4191-9A84-54A71CDE794F}"/>
+          <p:cNvPr id="10" name="直線矢印コネクタ 9">
+            <a:extLst>
+              <a:ext uri="{FF2B5EF4-FFF2-40B4-BE49-F238E27FC236}">
+                <a16:creationId xmlns:a16="http://schemas.microsoft.com/office/drawing/2014/main" id="{3C95248C-BBC2-4661-92D2-B25D6647B56E}"/>
               </a:ext>
             </a:extLst>
           </p:cNvPr>
@@ -9422,8 +9463,8 @@
         </p:nvCxnSpPr>
         <p:spPr>
           <a:xfrm>
-            <a:off x="5786964" y="3958304"/>
-            <a:ext cx="0" cy="1248696"/>
+            <a:off x="5786964" y="3969166"/>
+            <a:ext cx="0" cy="1533519"/>
           </a:xfrm>
           <a:prstGeom prst="straightConnector1">
             <a:avLst/>
@@ -9450,45 +9491,6 @@
           </a:fontRef>
         </p:style>
       </p:cxnSp>
-      <p:sp>
-        <p:nvSpPr>
-          <p:cNvPr id="9" name="テキスト ボックス 8">
-            <a:extLst>
-              <a:ext uri="{FF2B5EF4-FFF2-40B4-BE49-F238E27FC236}">
-                <a16:creationId xmlns:a16="http://schemas.microsoft.com/office/drawing/2014/main" id="{EC63539D-08AE-4428-B9EA-232077C800D9}"/>
-              </a:ext>
-            </a:extLst>
-          </p:cNvPr>
-          <p:cNvSpPr txBox="1"/>
-          <p:nvPr/>
-        </p:nvSpPr>
-        <p:spPr>
-          <a:xfrm>
-            <a:off x="5148919" y="4537928"/>
-            <a:ext cx="745067" cy="369332"/>
-          </a:xfrm>
-          <a:prstGeom prst="rect">
-            <a:avLst/>
-          </a:prstGeom>
-          <a:noFill/>
-        </p:spPr>
-        <p:txBody>
-          <a:bodyPr wrap="square">
-            <a:spAutoFit/>
-          </a:bodyPr>
-          <a:lstStyle/>
-          <a:p>
-            <a:r>
-              <a:rPr lang="ja-JP" altLang="en-US" b="1" dirty="0">
-                <a:solidFill>
-                  <a:srgbClr val="7030A0"/>
-                </a:solidFill>
-              </a:rPr>
-              <a:t>重さ</a:t>
-            </a:r>
-          </a:p>
-        </p:txBody>
-      </p:sp>
     </p:spTree>
     <p:extLst>
       <p:ext uri="{BB962C8B-B14F-4D97-AF65-F5344CB8AC3E}">
